--- a/Презентация ДП Марин Виктор.pptx
+++ b/Презентация ДП Марин Виктор.pptx
@@ -5571,7 +5571,7 @@
           <a:p>
             <a:fld id="{BE5457D3-7643-445A-92AB-3517B3725C26}" type="datetimeFigureOut">
               <a:rPr lang="ru-RU" smtClean="0"/>
-              <a:t>25.05.2026</a:t>
+              <a:t>30.05.2026</a:t>
             </a:fld>
             <a:endParaRPr lang="ru-RU"/>
           </a:p>
@@ -34565,7 +34565,7 @@
                 </a:solidFill>
                 <a:latin typeface="Nunito Bold" pitchFamily="2" charset="-52"/>
               </a:rPr>
-              <a:t>Научный руководитель: </a:t>
+              <a:t>Руководитель ДП: </a:t>
             </a:r>
             <a:r>
               <a:rPr lang="ru-RU" sz="2400" dirty="0" err="1">
@@ -34716,7 +34716,7 @@
                 <a:latin typeface="Nunito Bold" pitchFamily="2" charset="-52"/>
                 <a:ea typeface="Calibri" panose="020F0502020204030204" pitchFamily="34" charset="0"/>
               </a:rPr>
-              <a:t>Государственное бюджетное профессиональное образовательное учреждение московской области «Физико-технический колледж»</a:t>
+              <a:t>Государственное бюджетное профессиональное образовательное учреждение Московской области «Физико-технический колледж»</a:t>
             </a:r>
             <a:endParaRPr lang="ru-RU" sz="2400" dirty="0">
               <a:solidFill>
@@ -37124,8 +37124,8 @@
         </p:blipFill>
         <p:spPr>
           <a:xfrm>
-            <a:off x="3057045" y="2144453"/>
-            <a:ext cx="12173909" cy="5998094"/>
+            <a:off x="2329556" y="1786018"/>
+            <a:ext cx="13628888" cy="6714963"/>
           </a:xfrm>
           <a:prstGeom prst="rect">
             <a:avLst/>
@@ -37317,7 +37317,7 @@
           </a:bodyPr>
           <a:lstStyle/>
           <a:p>
-            <a:pPr algn="ctr"/>
+            <a:pPr algn="just"/>
             <a:r>
               <a:rPr lang="ru-RU" sz="2800" b="1" i="0" dirty="0">
                 <a:solidFill>
@@ -37330,7 +37330,7 @@
             </a:r>
           </a:p>
           <a:p>
-            <a:pPr algn="ctr"/>
+            <a:pPr algn="just"/>
             <a:endParaRPr lang="ru-RU" sz="2800" b="1" dirty="0">
               <a:solidFill>
                 <a:srgbClr val="F9FAFB"/>
@@ -37339,7 +37339,7 @@
             </a:endParaRPr>
           </a:p>
           <a:p>
-            <a:pPr algn="ctr"/>
+            <a:pPr algn="just"/>
             <a:r>
               <a:rPr lang="ru-RU" sz="2800" b="1" i="0" dirty="0">
                 <a:solidFill>
@@ -37359,7 +37359,7 @@
             </a:endParaRPr>
           </a:p>
           <a:p>
-            <a:pPr marL="342900" indent="-342900" algn="ctr">
+            <a:pPr marL="342900" indent="-342900" algn="just">
               <a:buFont typeface="Wingdings" panose="05000000000000000000" pitchFamily="2" charset="2"/>
               <a:buChar char="§"/>
             </a:pPr>
@@ -37435,7 +37435,7 @@
             </a:r>
           </a:p>
           <a:p>
-            <a:pPr marL="342900" indent="-342900" algn="ctr">
+            <a:pPr marL="342900" indent="-342900" algn="just">
               <a:buFont typeface="Wingdings" panose="05000000000000000000" pitchFamily="2" charset="2"/>
               <a:buChar char="§"/>
             </a:pPr>
@@ -37451,7 +37451,7 @@
             </a:r>
           </a:p>
           <a:p>
-            <a:pPr marL="342900" indent="-342900" algn="ctr">
+            <a:pPr marL="342900" indent="-342900" algn="just">
               <a:buFont typeface="Wingdings" panose="05000000000000000000" pitchFamily="2" charset="2"/>
               <a:buChar char="§"/>
             </a:pPr>

--- a/Презентация ДП Марин Виктор.pptx
+++ b/Презентация ДП Марин Виктор.pptx
@@ -5571,7 +5571,7 @@
           <a:p>
             <a:fld id="{BE5457D3-7643-445A-92AB-3517B3725C26}" type="datetimeFigureOut">
               <a:rPr lang="ru-RU" smtClean="0"/>
-              <a:t>30.05.2026</a:t>
+              <a:t>31.05.2026</a:t>
             </a:fld>
             <a:endParaRPr lang="ru-RU"/>
           </a:p>

--- a/Презентация ДП Марин Виктор.pptx
+++ b/Презентация ДП Марин Виктор.pptx
@@ -5571,7 +5571,7 @@
           <a:p>
             <a:fld id="{BE5457D3-7643-445A-92AB-3517B3725C26}" type="datetimeFigureOut">
               <a:rPr lang="ru-RU" smtClean="0"/>
-              <a:t>31.05.2026</a:t>
+              <a:t>15.06.2026</a:t>
             </a:fld>
             <a:endParaRPr lang="ru-RU"/>
           </a:p>
@@ -37042,8 +37042,8 @@
         </p:nvSpPr>
         <p:spPr>
           <a:xfrm>
-            <a:off x="5514392" y="429208"/>
-            <a:ext cx="7259216" cy="646331"/>
+            <a:off x="6516474" y="573781"/>
+            <a:ext cx="7259216" cy="707886"/>
           </a:xfrm>
           <a:prstGeom prst="rect">
             <a:avLst/>
@@ -37057,11 +37057,14 @@
           <a:lstStyle/>
           <a:p>
             <a:r>
-              <a:rPr lang="ru-RU" sz="3600" dirty="0">
+              <a:rPr lang="ru-RU" sz="4000" dirty="0">
                 <a:latin typeface="Nunito Bold" pitchFamily="2" charset="-52"/>
               </a:rPr>
-              <a:t>Демонстрация программы</a:t>
-            </a:r>
+              <a:t>Пример интерфейса</a:t>
+            </a:r>
+            <a:endParaRPr lang="ru-RU" sz="3600" dirty="0">
+              <a:latin typeface="Nunito Bold" pitchFamily="2" charset="-52"/>
+            </a:endParaRPr>
           </a:p>
         </p:txBody>
       </p:sp>

--- a/Презентация ДП Марин Виктор.pptx
+++ b/Презентация ДП Марин Виктор.pptx
@@ -5571,7 +5571,7 @@
           <a:p>
             <a:fld id="{BE5457D3-7643-445A-92AB-3517B3725C26}" type="datetimeFigureOut">
               <a:rPr lang="ru-RU" smtClean="0"/>
-              <a:t>15.06.2026</a:t>
+              <a:t>16.06.2026</a:t>
             </a:fld>
             <a:endParaRPr lang="ru-RU"/>
           </a:p>
@@ -34515,8 +34515,8 @@
         </p:nvSpPr>
         <p:spPr>
           <a:xfrm>
-            <a:off x="714375" y="1712178"/>
-            <a:ext cx="7953375" cy="1211813"/>
+            <a:off x="714375" y="1712177"/>
+            <a:ext cx="7953375" cy="3230883"/>
           </a:xfrm>
         </p:spPr>
         <p:txBody>
@@ -34524,7 +34524,7 @@
           <a:lstStyle/>
           <a:p>
             <a:r>
-              <a:rPr lang="ru-RU" sz="4000" dirty="0"/>
+              <a:rPr lang="ru-RU" sz="4800" dirty="0"/>
               <a:t>Разработка информационной системы управления ремонтами компьютеров</a:t>
             </a:r>
           </a:p>
@@ -34544,7 +34544,7 @@
         </p:nvSpPr>
         <p:spPr>
           <a:xfrm>
-            <a:off x="697560" y="6864022"/>
+            <a:off x="714375" y="8062001"/>
             <a:ext cx="8446440" cy="461665"/>
           </a:xfrm>
           <a:prstGeom prst="rect">
@@ -34602,8 +34602,8 @@
         </p:nvSpPr>
         <p:spPr>
           <a:xfrm>
-            <a:off x="697560" y="5720546"/>
-            <a:ext cx="7953375" cy="830997"/>
+            <a:off x="714375" y="5839290"/>
+            <a:ext cx="7953375" cy="1938992"/>
           </a:xfrm>
           <a:prstGeom prst="rect">
             <a:avLst/>
@@ -34623,101 +34623,16 @@
                 </a:solidFill>
                 <a:latin typeface="Nunito Bold" pitchFamily="2" charset="-52"/>
               </a:rPr>
-              <a:t>Студент: Марин Виктор Васильевич</a:t>
-            </a:r>
-          </a:p>
-          <a:p>
-            <a:r>
+              <a:t>Студент: Марин Виктор Васильевич ИСП – 21</a:t>
+            </a:r>
+            <a:br>
               <a:rPr lang="ru-RU" sz="2400" dirty="0">
                 <a:solidFill>
                   <a:schemeClr val="bg1"/>
                 </a:solidFill>
                 <a:latin typeface="Nunito Bold" pitchFamily="2" charset="-52"/>
               </a:rPr>
-              <a:t>Группа ИСП - 21</a:t>
-            </a:r>
-          </a:p>
-        </p:txBody>
-      </p:sp>
-      <p:sp>
-        <p:nvSpPr>
-          <p:cNvPr id="8" name="TextBox 7">
-            <a:extLst>
-              <a:ext uri="{FF2B5EF4-FFF2-40B4-BE49-F238E27FC236}">
-                <a16:creationId xmlns:a16="http://schemas.microsoft.com/office/drawing/2014/main" id="{2A0BDA60-DE2D-43B0-94F1-B954E0C29B0B}"/>
-              </a:ext>
-            </a:extLst>
-          </p:cNvPr>
-          <p:cNvSpPr txBox="1"/>
-          <p:nvPr/>
-        </p:nvSpPr>
-        <p:spPr>
-          <a:xfrm>
-            <a:off x="7767735" y="9386595"/>
-            <a:ext cx="2752530" cy="400110"/>
-          </a:xfrm>
-          <a:prstGeom prst="rect">
-            <a:avLst/>
-          </a:prstGeom>
-          <a:noFill/>
-        </p:spPr>
-        <p:txBody>
-          <a:bodyPr wrap="square" rtlCol="0">
-            <a:spAutoFit/>
-          </a:bodyPr>
-          <a:lstStyle/>
-          <a:p>
-            <a:r>
-              <a:rPr lang="ru-RU" sz="2000" dirty="0">
-                <a:solidFill>
-                  <a:schemeClr val="bg1"/>
-                </a:solidFill>
-                <a:latin typeface="Nunito Bold" pitchFamily="2" charset="-52"/>
-              </a:rPr>
-              <a:t>Долгопрудный 2026</a:t>
-            </a:r>
-          </a:p>
-        </p:txBody>
-      </p:sp>
-      <p:sp>
-        <p:nvSpPr>
-          <p:cNvPr id="9" name="TextBox 8">
-            <a:extLst>
-              <a:ext uri="{FF2B5EF4-FFF2-40B4-BE49-F238E27FC236}">
-                <a16:creationId xmlns:a16="http://schemas.microsoft.com/office/drawing/2014/main" id="{B922C7B9-A81D-3839-6A8F-1676FDA18E07}"/>
-              </a:ext>
-            </a:extLst>
-          </p:cNvPr>
-          <p:cNvSpPr txBox="1"/>
-          <p:nvPr/>
-        </p:nvSpPr>
-        <p:spPr>
-          <a:xfrm>
-            <a:off x="3960845" y="343612"/>
-            <a:ext cx="10366310" cy="1200329"/>
-          </a:xfrm>
-          <a:prstGeom prst="rect">
-            <a:avLst/>
-          </a:prstGeom>
-          <a:noFill/>
-        </p:spPr>
-        <p:txBody>
-          <a:bodyPr wrap="square" rtlCol="0">
-            <a:spAutoFit/>
-          </a:bodyPr>
-          <a:lstStyle/>
-          <a:p>
-            <a:pPr algn="ctr"/>
-            <a:r>
-              <a:rPr lang="ru-RU" sz="2400" dirty="0">
-                <a:solidFill>
-                  <a:schemeClr val="bg1"/>
-                </a:solidFill>
-                <a:latin typeface="Nunito Bold" pitchFamily="2" charset="-52"/>
-                <a:ea typeface="Calibri" panose="020F0502020204030204" pitchFamily="34" charset="0"/>
-              </a:rPr>
-              <a:t>Государственное бюджетное профессиональное образовательное учреждение Московской области «Физико-технический колледж»</a:t>
-            </a:r>
+            </a:br>
             <a:endParaRPr lang="ru-RU" sz="2400" dirty="0">
               <a:solidFill>
                 <a:schemeClr val="bg1"/>
@@ -34726,8 +34641,129 @@
             </a:endParaRPr>
           </a:p>
           <a:p>
+            <a:r>
+              <a:rPr lang="ru-RU" sz="2400" dirty="0">
+                <a:solidFill>
+                  <a:schemeClr val="bg1"/>
+                </a:solidFill>
+                <a:latin typeface="Nunito Bold" pitchFamily="2" charset="-52"/>
+              </a:rPr>
+              <a:t>Специальность: 09.02.07 </a:t>
+            </a:r>
+          </a:p>
+          <a:p>
+            <a:r>
+              <a:rPr lang="ru-RU" sz="2400" dirty="0">
+                <a:solidFill>
+                  <a:schemeClr val="bg1"/>
+                </a:solidFill>
+                <a:latin typeface="Nunito Bold" pitchFamily="2" charset="-52"/>
+              </a:rPr>
+              <a:t>«Информационные системы и </a:t>
+            </a:r>
+          </a:p>
+          <a:p>
+            <a:r>
+              <a:rPr lang="ru-RU" sz="2400" dirty="0">
+                <a:solidFill>
+                  <a:schemeClr val="bg1"/>
+                </a:solidFill>
+                <a:latin typeface="Nunito Bold" pitchFamily="2" charset="-52"/>
+              </a:rPr>
+              <a:t>программирование</a:t>
+            </a:r>
+          </a:p>
+        </p:txBody>
+      </p:sp>
+      <p:sp>
+        <p:nvSpPr>
+          <p:cNvPr id="8" name="TextBox 7">
+            <a:extLst>
+              <a:ext uri="{FF2B5EF4-FFF2-40B4-BE49-F238E27FC236}">
+                <a16:creationId xmlns:a16="http://schemas.microsoft.com/office/drawing/2014/main" id="{2A0BDA60-DE2D-43B0-94F1-B954E0C29B0B}"/>
+              </a:ext>
+            </a:extLst>
+          </p:cNvPr>
+          <p:cNvSpPr txBox="1"/>
+          <p:nvPr/>
+        </p:nvSpPr>
+        <p:spPr>
+          <a:xfrm>
+            <a:off x="7767735" y="9386595"/>
+            <a:ext cx="2752530" cy="400110"/>
+          </a:xfrm>
+          <a:prstGeom prst="rect">
+            <a:avLst/>
+          </a:prstGeom>
+          <a:noFill/>
+        </p:spPr>
+        <p:txBody>
+          <a:bodyPr wrap="square" rtlCol="0">
+            <a:spAutoFit/>
+          </a:bodyPr>
+          <a:lstStyle/>
+          <a:p>
+            <a:r>
+              <a:rPr lang="ru-RU" sz="2000" dirty="0">
+                <a:solidFill>
+                  <a:schemeClr val="bg1"/>
+                </a:solidFill>
+                <a:latin typeface="Nunito Bold" pitchFamily="2" charset="-52"/>
+              </a:rPr>
+              <a:t>Долгопрудный 2026</a:t>
+            </a:r>
+          </a:p>
+        </p:txBody>
+      </p:sp>
+      <p:sp>
+        <p:nvSpPr>
+          <p:cNvPr id="9" name="TextBox 8">
+            <a:extLst>
+              <a:ext uri="{FF2B5EF4-FFF2-40B4-BE49-F238E27FC236}">
+                <a16:creationId xmlns:a16="http://schemas.microsoft.com/office/drawing/2014/main" id="{B922C7B9-A81D-3839-6A8F-1676FDA18E07}"/>
+              </a:ext>
+            </a:extLst>
+          </p:cNvPr>
+          <p:cNvSpPr txBox="1"/>
+          <p:nvPr/>
+        </p:nvSpPr>
+        <p:spPr>
+          <a:xfrm>
+            <a:off x="3352022" y="327183"/>
+            <a:ext cx="11583955" cy="1384995"/>
+          </a:xfrm>
+          <a:prstGeom prst="rect">
+            <a:avLst/>
+          </a:prstGeom>
+          <a:noFill/>
+        </p:spPr>
+        <p:txBody>
+          <a:bodyPr wrap="square" rtlCol="0">
+            <a:spAutoFit/>
+          </a:bodyPr>
+          <a:lstStyle/>
+          <a:p>
             <a:pPr algn="ctr"/>
-            <a:endParaRPr lang="ru-RU" sz="2400" dirty="0">
+            <a:r>
+              <a:rPr lang="ru-RU" sz="2800" dirty="0">
+                <a:solidFill>
+                  <a:schemeClr val="bg1"/>
+                </a:solidFill>
+                <a:latin typeface="Nunito Bold" pitchFamily="2" charset="-52"/>
+                <a:ea typeface="Calibri" panose="020F0502020204030204" pitchFamily="34" charset="0"/>
+              </a:rPr>
+              <a:t>Государственное бюджетное профессиональное образовательное учреждение Московской области «Физико-технический колледж»</a:t>
+            </a:r>
+            <a:endParaRPr lang="ru-RU" sz="2800" dirty="0">
+              <a:solidFill>
+                <a:schemeClr val="bg1"/>
+              </a:solidFill>
+              <a:latin typeface="Nunito Bold" pitchFamily="2" charset="-52"/>
+            </a:endParaRPr>
+          </a:p>
+          <a:p>
+            <a:pPr algn="ctr"/>
+            <a:endParaRPr lang="ru-RU" sz="2800" dirty="0">
               <a:solidFill>
                 <a:schemeClr val="bg1"/>
               </a:solidFill>

--- a/Презентация ДП Марин Виктор.pptx
+++ b/Презентация ДП Марин Виктор.pptx
@@ -34544,7 +34544,7 @@
         </p:nvSpPr>
         <p:spPr>
           <a:xfrm>
-            <a:off x="714375" y="8062001"/>
+            <a:off x="714375" y="8262632"/>
             <a:ext cx="8446440" cy="461665"/>
           </a:xfrm>
           <a:prstGeom prst="rect">
@@ -34602,8 +34602,8 @@
         </p:nvSpPr>
         <p:spPr>
           <a:xfrm>
-            <a:off x="714375" y="5839290"/>
-            <a:ext cx="7953375" cy="1938992"/>
+            <a:off x="714375" y="5391176"/>
+            <a:ext cx="7953375" cy="2677656"/>
           </a:xfrm>
           <a:prstGeom prst="rect">
             <a:avLst/>
@@ -34623,7 +34623,35 @@
                 </a:solidFill>
                 <a:latin typeface="Nunito Bold" pitchFamily="2" charset="-52"/>
               </a:rPr>
-              <a:t>Студент: Марин Виктор Васильевич ИСП – 21</a:t>
+              <a:t>Студент: Марин Виктор Васильевич</a:t>
+            </a:r>
+          </a:p>
+          <a:p>
+            <a:r>
+              <a:rPr lang="ru-RU" sz="2400" dirty="0">
+                <a:solidFill>
+                  <a:schemeClr val="bg1"/>
+                </a:solidFill>
+                <a:latin typeface="Nunito Bold" pitchFamily="2" charset="-52"/>
+              </a:rPr>
+              <a:t> </a:t>
+            </a:r>
+            <a:br>
+              <a:rPr lang="ru-RU" sz="2400" dirty="0">
+                <a:solidFill>
+                  <a:schemeClr val="bg1"/>
+                </a:solidFill>
+                <a:latin typeface="Nunito Bold" pitchFamily="2" charset="-52"/>
+              </a:rPr>
+            </a:br>
+            <a:r>
+              <a:rPr lang="ru-RU" sz="2400" dirty="0">
+                <a:solidFill>
+                  <a:schemeClr val="bg1"/>
+                </a:solidFill>
+                <a:latin typeface="Nunito Bold" pitchFamily="2" charset="-52"/>
+              </a:rPr>
+              <a:t>Группа: ИСП – 21</a:t>
             </a:r>
             <a:br>
               <a:rPr lang="ru-RU" sz="2400" dirty="0">

--- a/Презентация ДП Марин Виктор.pptx
+++ b/Презентация ДП Марин Виктор.pptx
@@ -5571,7 +5571,7 @@
           <a:p>
             <a:fld id="{BE5457D3-7643-445A-92AB-3517B3725C26}" type="datetimeFigureOut">
               <a:rPr lang="ru-RU" smtClean="0"/>
-              <a:t>16.06.2026</a:t>
+              <a:t>17.06.2026</a:t>
             </a:fld>
             <a:endParaRPr lang="ru-RU"/>
           </a:p>
@@ -34692,14 +34692,20 @@
           </a:p>
           <a:p>
             <a:r>
-              <a:rPr lang="ru-RU" sz="2400" dirty="0">
+              <a:rPr lang="ru-RU" sz="2400">
                 <a:solidFill>
                   <a:schemeClr val="bg1"/>
                 </a:solidFill>
                 <a:latin typeface="Nunito Bold" pitchFamily="2" charset="-52"/>
               </a:rPr>
-              <a:t>программирование</a:t>
-            </a:r>
+              <a:t>Программирование»</a:t>
+            </a:r>
+            <a:endParaRPr lang="ru-RU" sz="2400" dirty="0">
+              <a:solidFill>
+                <a:schemeClr val="bg1"/>
+              </a:solidFill>
+              <a:latin typeface="Nunito Bold" pitchFamily="2" charset="-52"/>
+            </a:endParaRPr>
           </a:p>
         </p:txBody>
       </p:sp>

--- a/Презентация ДП Марин Виктор.pptx
+++ b/Презентация ДП Марин Виктор.pptx
@@ -5835,7 +5835,11 @@
           <a:bodyPr/>
           <a:lstStyle/>
           <a:p>
-            <a:endParaRPr lang="en-US" dirty="0"/>
+            <a:pPr algn="ctr"/>
+            <a:r>
+              <a:rPr lang="ru-RU" sz="2800" baseline="0" dirty="0"/>
+              <a:t>Не забудь про актуальность</a:t>
+            </a:r>
           </a:p>
         </p:txBody>
       </p:sp>
@@ -6003,6 +6007,11 @@
           <a:bodyPr/>
           <a:lstStyle/>
           <a:p>
+            <a:pPr algn="ctr"/>
+            <a:r>
+              <a:rPr lang="ru-RU" dirty="0"/>
+              <a:t>Модули	Взаимодействие </a:t>
+            </a:r>
             <a:endParaRPr lang="en-US" dirty="0"/>
           </a:p>
         </p:txBody>
@@ -6087,6 +6096,11 @@
           <a:bodyPr/>
           <a:lstStyle/>
           <a:p>
+            <a:pPr algn="ctr"/>
+            <a:r>
+              <a:rPr lang="ru-RU" dirty="0"/>
+              <a:t>Умения программы</a:t>
+            </a:r>
             <a:endParaRPr lang="en-US" dirty="0"/>
           </a:p>
         </p:txBody>
@@ -6171,6 +6185,7 @@
           <a:bodyPr/>
           <a:lstStyle/>
           <a:p>
+            <a:pPr algn="ctr"/>
             <a:endParaRPr lang="en-US" dirty="0"/>
           </a:p>
         </p:txBody>
@@ -34996,7 +35011,17 @@
                 <a:effectLst/>
                 <a:latin typeface="Nunito Bold" pitchFamily="2" charset="-52"/>
               </a:rPr>
-              <a:t> работы</a:t>
+              <a:t> </a:t>
+            </a:r>
+            <a:r>
+              <a:rPr lang="ru-RU" sz="2400" b="1" i="0" dirty="0">
+                <a:solidFill>
+                  <a:srgbClr val="4472C4"/>
+                </a:solidFill>
+                <a:effectLst/>
+                <a:latin typeface="Nunito Bold" pitchFamily="2" charset="-52"/>
+              </a:rPr>
+              <a:t>работы</a:t>
             </a:r>
             <a:r>
               <a:rPr lang="ru-RU" sz="2400" b="0" i="0" dirty="0">

--- a/Презентация ДП Марин Виктор.pptx
+++ b/Презентация ДП Марин Виктор.pptx
@@ -6010,7 +6010,7 @@
             <a:pPr algn="ctr"/>
             <a:r>
               <a:rPr lang="ru-RU" dirty="0"/>
-              <a:t>Модули	Взаимодействие </a:t>
+              <a:t>Состоит из модулей	Взаимодействие пользователя</a:t>
             </a:r>
             <a:endParaRPr lang="en-US" dirty="0"/>
           </a:p>
@@ -6099,7 +6099,7 @@
             <a:pPr algn="ctr"/>
             <a:r>
               <a:rPr lang="ru-RU" dirty="0"/>
-              <a:t>Умения программы</a:t>
+              <a:t>Понятный интерфейс и то что умеет программа</a:t>
             </a:r>
             <a:endParaRPr lang="en-US" dirty="0"/>
           </a:p>
@@ -6186,6 +6186,14 @@
           <a:lstStyle/>
           <a:p>
             <a:pPr algn="ctr"/>
+            <a:r>
+              <a:rPr lang="ru-RU" dirty="0"/>
+              <a:t>Окончен. Разрешение </a:t>
+            </a:r>
+            <a:r>
+              <a:rPr lang="ru-RU"/>
+              <a:t>на демонстрацию</a:t>
+            </a:r>
             <a:endParaRPr lang="en-US" dirty="0"/>
           </a:p>
         </p:txBody>
